--- a/CSDS/A/CSDS-A-A9/7.Review_1_PPT.pptx
+++ b/CSDS/A/CSDS-A-A9/7.Review_1_PPT.pptx
@@ -1093,7 +1093,7 @@
           <a:lstStyle/>
           <a:p>
             <a:r>
-              <a:t>The approach in five blocks. The proxy model can later be replaced by a LoRA adapter tensor without changing the verification and audit workflow.</a:t>
+              <a:t>The approach in five blocks. The same clip, noisy-sum, subtraction, verification and audit workflow runs on the bigram model and on LoRA-style adapters of a small GRU (neural study, synthetic data).</a:t>
             </a:r>
           </a:p>
         </p:txBody>
@@ -1609,7 +1609,7 @@
           <a:lstStyle/>
           <a:p>
             <a:r>
-              <a:t>The problem, the idea and the deliverable. The prototype is a demonstrator on a small proxy model; the later reviews report what it does and does not prove.</a:t>
+              <a:t>The problem, the idea and the deliverable. The prototype is a demonstrator on small models and synthetic data; the later reviews report what it proves and what it measures.</a:t>
             </a:r>
           </a:p>
         </p:txBody>
@@ -1867,7 +1867,7 @@
           <a:lstStyle/>
           <a:p>
             <a:r>
-              <a:t>No-noise = noise multiplier 1e-6, five clients, one removal each. Default noise = sigma 3, mean over 50 seeds x 5 clients (250 requests). Both come from experiments/noise_free_leakage and experiments/seeds.</a:t>
+              <a:t>No-noise = noise multiplier 1e-6, five clients, one removal each. Default noise = sigma 3, mean over 50 seeds x 5 clients (250 requests). Both come from experiments/noise_free_leakage and experiments/seeds. The neural figures come from experiments/neural_adapter (sigma 0, 5 seeds x 8 clients).</a:t>
             </a:r>
           </a:p>
         </p:txBody>
@@ -5025,7 +5025,7 @@
                   <a:srgbClr val="475569"/>
                 </a:solidFill>
               </a:rPr>
-              <a:t>SHA-256 hash-chained ledger; Python API and React UI. The model is a character-level proxy for an LLM adapter.</a:t>
+              <a:t>SHA-256 hash-chained ledger; Python API and React UI. Shown on a bigram model and on neural LoRA-style adapters (synthetic data).</a:t>
             </a:r>
             <a:endParaRPr lang="en-US" sz="1200" dirty="0"/>
           </a:p>
@@ -5175,7 +5175,7 @@
                   <a:srgbClr val="64748B"/>
                 </a:solidFill>
               </a:rPr>
-              <a:t>Proposed architecture: React UI, Python API, federated unlearning engine, bigram proxy model and hash-chained ledger</a:t>
+              <a:t>Proposed architecture: React UI, Python API, federated unlearning engine, bigram model and hash-chained ledger</a:t>
             </a:r>
             <a:endParaRPr lang="en-US" sz="1100" dirty="0"/>
           </a:p>
@@ -6279,7 +6279,7 @@
                   <a:srgbClr val="475569"/>
                 </a:solidFill>
               </a:rPr>
-              <a:t>Python API and React UI that run offline on one PC.</a:t>
+              <a:t>Python API and React UI that run offline on one PC, plus the same method on a small neural adapter model.</a:t>
             </a:r>
             <a:endParaRPr lang="en-US" sz="1600" dirty="0"/>
           </a:p>
@@ -8415,7 +8415,7 @@
                   <a:srgbClr val="475569"/>
                 </a:solidFill>
               </a:rPr>
-              <a:t>ForgetSafe: a Python API (port 8109) and React UI (port 5109) that issue a certificate per request. It runs on a character-level proxy for an LLM adapter update, not on a real LLM.</a:t>
+              <a:t>ForgetSafe: a Python API (port 8109) and React UI (port 5109) that issue a certificate per request. The engine runs on a character-bigram model and, in a second study, on a neural GRU with LoRA-style adapters, both on synthetic data.</a:t>
             </a:r>
             <a:endParaRPr lang="en-US" sz="1500" dirty="0"/>
           </a:p>
@@ -11431,14 +11431,14 @@
               <a:buNone/>
             </a:pPr>
             <a:r>
-              <a:rPr lang="en-US" sz="1250" dirty="0">
+              <a:rPr lang="en-US" sz="1100" dirty="0">
                 <a:solidFill>
                   <a:srgbClr val="475569"/>
                 </a:solidFill>
               </a:rPr>
-              <a:t>Our own early measurement on a 25-sentence proxy model. It shows that training leaves a measurable trace and that removal can erase it; it is not a field result. The literature [2]-[4], [7] motivates the problem.</a:t>
-            </a:r>
-            <a:endParaRPr lang="en-US" sz="1250" dirty="0"/>
+              <a:t>Synthetic-data measurements: the 25-sentence bigram model above, and a 137,151-parameter neural GRU with LoRA-style adapters (8 clients), where the client-level attack falls from 0.78 to 0.53, the same as a fresh retrain (0.53). Literature [2]-[4], [7] motivates the problem.</a:t>
+            </a:r>
+            <a:endParaRPr lang="en-US" sz="1100" dirty="0"/>
           </a:p>
         </p:txBody>
       </p:sp>
